--- a/module-03-grid-driving/slides/03-turning-on-the-grid.pptx
+++ b/module-03-grid-driving/slides/03-turning-on-the-grid.pptx
@@ -4158,7 +4158,7 @@
               <a:spcAft>
                 <a:spcPts val="100"/>
               </a:spcAft>
-              <a:defRPr sz="1300">
+              <a:defRPr sz="1800">
                 <a:solidFill>
                   <a:srgbClr val="333333"/>
                 </a:solidFill>
@@ -4174,7 +4174,7 @@
               <a:spcAft>
                 <a:spcPts val="100"/>
               </a:spcAft>
-              <a:defRPr sz="1300">
+              <a:defRPr sz="1800">
                 <a:solidFill>
                   <a:srgbClr val="333333"/>
                 </a:solidFill>
@@ -4190,7 +4190,7 @@
               <a:spcAft>
                 <a:spcPts val="100"/>
               </a:spcAft>
-              <a:defRPr sz="1300">
+              <a:defRPr sz="1800">
                 <a:solidFill>
                   <a:srgbClr val="333333"/>
                 </a:solidFill>
@@ -4206,7 +4206,7 @@
               <a:spcAft>
                 <a:spcPts val="100"/>
               </a:spcAft>
-              <a:defRPr sz="1300">
+              <a:defRPr sz="1800">
                 <a:solidFill>
                   <a:srgbClr val="333333"/>
                 </a:solidFill>
@@ -4222,7 +4222,7 @@
               <a:spcAft>
                 <a:spcPts val="100"/>
               </a:spcAft>
-              <a:defRPr sz="1300">
+              <a:defRPr sz="1800">
                 <a:solidFill>
                   <a:srgbClr val="333333"/>
                 </a:solidFill>
@@ -4611,7 +4611,7 @@
               <a:spcAft>
                 <a:spcPts val="100"/>
               </a:spcAft>
-              <a:defRPr sz="1300">
+              <a:defRPr sz="1800">
                 <a:solidFill>
                   <a:srgbClr val="333333"/>
                 </a:solidFill>
@@ -4619,7 +4619,7 @@
               </a:defRPr>
             </a:pPr>
             <a:r>
-              <a:t>drive_intersections(tracker, 2)</a:t>
+              <a:t>drive_intersections(2)</a:t>
             </a:r>
           </a:p>
           <a:p>
@@ -4627,7 +4627,7 @@
               <a:spcAft>
                 <a:spcPts val="100"/>
               </a:spcAft>
-              <a:defRPr sz="1300">
+              <a:defRPr sz="1800">
                 <a:solidFill>
                   <a:srgbClr val="333333"/>
                 </a:solidFill>
@@ -4635,7 +4635,7 @@
               </a:defRPr>
             </a:pPr>
             <a:r>
-              <a:t>tracker.turn_right()</a:t>
+              <a:t>turn_right()</a:t>
             </a:r>
           </a:p>
           <a:p>
@@ -4643,7 +4643,7 @@
               <a:spcAft>
                 <a:spcPts val="100"/>
               </a:spcAft>
-              <a:defRPr sz="1300">
+              <a:defRPr sz="1800">
                 <a:solidFill>
                   <a:srgbClr val="333333"/>
                 </a:solidFill>
@@ -4651,7 +4651,7 @@
               </a:defRPr>
             </a:pPr>
             <a:r>
-              <a:t>drive_intersections(tracker, 2)</a:t>
+              <a:t>drive_intersections(2)</a:t>
             </a:r>
           </a:p>
         </p:txBody>
@@ -4727,7 +4727,7 @@
               <a:spcAft>
                 <a:spcPts val="100"/>
               </a:spcAft>
-              <a:defRPr sz="1300">
+              <a:defRPr sz="1800">
                 <a:solidFill>
                   <a:srgbClr val="333333"/>
                 </a:solidFill>
@@ -4743,7 +4743,7 @@
               <a:spcAft>
                 <a:spcPts val="100"/>
               </a:spcAft>
-              <a:defRPr sz="1300">
+              <a:defRPr sz="1800">
                 <a:solidFill>
                   <a:srgbClr val="333333"/>
                 </a:solidFill>
@@ -4759,7 +4759,7 @@
               <a:spcAft>
                 <a:spcPts val="100"/>
               </a:spcAft>
-              <a:defRPr sz="1300">
+              <a:defRPr sz="1800">
                 <a:solidFill>
                   <a:srgbClr val="333333"/>
                 </a:solidFill>
@@ -4775,7 +4775,7 @@
               <a:spcAft>
                 <a:spcPts val="100"/>
               </a:spcAft>
-              <a:defRPr sz="1300">
+              <a:defRPr sz="1800">
                 <a:solidFill>
                   <a:srgbClr val="333333"/>
                 </a:solidFill>
@@ -4791,7 +4791,7 @@
               <a:spcAft>
                 <a:spcPts val="100"/>
               </a:spcAft>
-              <a:defRPr sz="1300">
+              <a:defRPr sz="1800">
                 <a:solidFill>
                   <a:srgbClr val="333333"/>
                 </a:solidFill>
@@ -5008,7 +5008,7 @@
               <a:spcAft>
                 <a:spcPts val="100"/>
               </a:spcAft>
-              <a:defRPr sz="1300">
+              <a:defRPr sz="1800">
                 <a:solidFill>
                   <a:srgbClr val="333333"/>
                 </a:solidFill>
@@ -5024,7 +5024,7 @@
               <a:spcAft>
                 <a:spcPts val="100"/>
               </a:spcAft>
-              <a:defRPr sz="1300">
+              <a:defRPr sz="1800">
                 <a:solidFill>
                   <a:srgbClr val="333333"/>
                 </a:solidFill>
@@ -5032,7 +5032,7 @@
               </a:defRPr>
             </a:pPr>
             <a:r>
-              <a:t>drive_intersections(tracker, 2)</a:t>
+              <a:t>drive_intersections(2)</a:t>
             </a:r>
           </a:p>
           <a:p>
@@ -5040,7 +5040,7 @@
               <a:spcAft>
                 <a:spcPts val="100"/>
               </a:spcAft>
-              <a:defRPr sz="1300">
+              <a:defRPr sz="1800">
                 <a:solidFill>
                   <a:srgbClr val="333333"/>
                 </a:solidFill>
@@ -5053,7 +5053,7 @@
               <a:spcAft>
                 <a:spcPts val="100"/>
               </a:spcAft>
-              <a:defRPr sz="1300">
+              <a:defRPr sz="1800">
                 <a:solidFill>
                   <a:srgbClr val="333333"/>
                 </a:solidFill>
@@ -5069,7 +5069,7 @@
               <a:spcAft>
                 <a:spcPts val="100"/>
               </a:spcAft>
-              <a:defRPr sz="1300">
+              <a:defRPr sz="1800">
                 <a:solidFill>
                   <a:srgbClr val="333333"/>
                 </a:solidFill>
@@ -5077,7 +5077,7 @@
               </a:defRPr>
             </a:pPr>
             <a:r>
-              <a:t>tracker.turn_right()</a:t>
+              <a:t>turn_right()</a:t>
             </a:r>
           </a:p>
           <a:p>
@@ -5085,7 +5085,7 @@
               <a:spcAft>
                 <a:spcPts val="100"/>
               </a:spcAft>
-              <a:defRPr sz="1300">
+              <a:defRPr sz="1800">
                 <a:solidFill>
                   <a:srgbClr val="333333"/>
                 </a:solidFill>
@@ -5098,7 +5098,7 @@
               <a:spcAft>
                 <a:spcPts val="100"/>
               </a:spcAft>
-              <a:defRPr sz="1300">
+              <a:defRPr sz="1800">
                 <a:solidFill>
                   <a:srgbClr val="333333"/>
                 </a:solidFill>
@@ -5114,7 +5114,7 @@
               <a:spcAft>
                 <a:spcPts val="100"/>
               </a:spcAft>
-              <a:defRPr sz="1300">
+              <a:defRPr sz="1800">
                 <a:solidFill>
                   <a:srgbClr val="333333"/>
                 </a:solidFill>
@@ -5122,7 +5122,7 @@
               </a:defRPr>
             </a:pPr>
             <a:r>
-              <a:t>drive_intersections(tracker, 2)</a:t>
+              <a:t>drive_intersections(2)</a:t>
             </a:r>
           </a:p>
         </p:txBody>
@@ -5559,7 +5559,7 @@
               <a:spcAft>
                 <a:spcPts val="100"/>
               </a:spcAft>
-              <a:defRPr sz="1300">
+              <a:defRPr sz="1800">
                 <a:solidFill>
                   <a:srgbClr val="333333"/>
                 </a:solidFill>
@@ -5575,7 +5575,7 @@
               <a:spcAft>
                 <a:spcPts val="100"/>
               </a:spcAft>
-              <a:defRPr sz="1300">
+              <a:defRPr sz="1800">
                 <a:solidFill>
                   <a:srgbClr val="333333"/>
                 </a:solidFill>
@@ -5591,7 +5591,7 @@
               <a:spcAft>
                 <a:spcPts val="100"/>
               </a:spcAft>
-              <a:defRPr sz="1300">
+              <a:defRPr sz="1800">
                 <a:solidFill>
                   <a:srgbClr val="333333"/>
                 </a:solidFill>
@@ -5607,7 +5607,7 @@
               <a:spcAft>
                 <a:spcPts val="100"/>
               </a:spcAft>
-              <a:defRPr sz="1300">
+              <a:defRPr sz="1800">
                 <a:solidFill>
                   <a:srgbClr val="333333"/>
                 </a:solidFill>
@@ -5623,7 +5623,7 @@
               <a:spcAft>
                 <a:spcPts val="100"/>
               </a:spcAft>
-              <a:defRPr sz="1300">
+              <a:defRPr sz="1800">
                 <a:solidFill>
                   <a:srgbClr val="333333"/>
                 </a:solidFill>
@@ -5960,7 +5960,7 @@
               <a:spcAft>
                 <a:spcPts val="100"/>
               </a:spcAft>
-              <a:defRPr sz="1300">
+              <a:defRPr sz="1800">
                 <a:solidFill>
                   <a:srgbClr val="333333"/>
                 </a:solidFill>
@@ -5968,7 +5968,7 @@
               </a:defRPr>
             </a:pPr>
             <a:r>
-              <a:t>drive_intersections(tracker, 3)</a:t>
+              <a:t>drive_intersections(3)</a:t>
             </a:r>
           </a:p>
           <a:p>
@@ -5976,7 +5976,7 @@
               <a:spcAft>
                 <a:spcPts val="100"/>
               </a:spcAft>
-              <a:defRPr sz="1300">
+              <a:defRPr sz="1800">
                 <a:solidFill>
                   <a:srgbClr val="333333"/>
                 </a:solidFill>
@@ -5984,7 +5984,7 @@
               </a:defRPr>
             </a:pPr>
             <a:r>
-              <a:t>tracker.turn_right()</a:t>
+              <a:t>turn_right()</a:t>
             </a:r>
           </a:p>
           <a:p>
@@ -5992,7 +5992,7 @@
               <a:spcAft>
                 <a:spcPts val="100"/>
               </a:spcAft>
-              <a:defRPr sz="1300">
+              <a:defRPr sz="1800">
                 <a:solidFill>
                   <a:srgbClr val="333333"/>
                 </a:solidFill>
@@ -6000,7 +6000,7 @@
               </a:defRPr>
             </a:pPr>
             <a:r>
-              <a:t>drive_intersections(tracker, 1)</a:t>
+              <a:t>drive_intersections(1)</a:t>
             </a:r>
           </a:p>
           <a:p>
@@ -6008,7 +6008,7 @@
               <a:spcAft>
                 <a:spcPts val="100"/>
               </a:spcAft>
-              <a:defRPr sz="1300">
+              <a:defRPr sz="1800">
                 <a:solidFill>
                   <a:srgbClr val="333333"/>
                 </a:solidFill>
@@ -6016,7 +6016,7 @@
               </a:defRPr>
             </a:pPr>
             <a:r>
-              <a:t>tracker.turn_right()</a:t>
+              <a:t>turn_right()</a:t>
             </a:r>
           </a:p>
           <a:p>
@@ -6024,7 +6024,7 @@
               <a:spcAft>
                 <a:spcPts val="100"/>
               </a:spcAft>
-              <a:defRPr sz="1300">
+              <a:defRPr sz="1800">
                 <a:solidFill>
                   <a:srgbClr val="333333"/>
                 </a:solidFill>
@@ -6032,7 +6032,7 @@
               </a:defRPr>
             </a:pPr>
             <a:r>
-              <a:t>drive_intersections(tracker, 3)</a:t>
+              <a:t>drive_intersections(3)</a:t>
             </a:r>
           </a:p>
         </p:txBody>
@@ -6108,7 +6108,7 @@
               <a:spcAft>
                 <a:spcPts val="100"/>
               </a:spcAft>
-              <a:defRPr sz="1300">
+              <a:defRPr sz="1800">
                 <a:solidFill>
                   <a:srgbClr val="333333"/>
                 </a:solidFill>
@@ -6116,7 +6116,7 @@
               </a:defRPr>
             </a:pPr>
             <a:r>
-              <a:t>drive_intersections(tracker, 2)</a:t>
+              <a:t>drive_intersections(2)</a:t>
             </a:r>
           </a:p>
           <a:p>
@@ -6124,7 +6124,7 @@
               <a:spcAft>
                 <a:spcPts val="100"/>
               </a:spcAft>
-              <a:defRPr sz="1300">
+              <a:defRPr sz="1800">
                 <a:solidFill>
                   <a:srgbClr val="333333"/>
                 </a:solidFill>
@@ -6132,7 +6132,7 @@
               </a:defRPr>
             </a:pPr>
             <a:r>
-              <a:t>tracker.turn_right()</a:t>
+              <a:t>turn_right()</a:t>
             </a:r>
           </a:p>
           <a:p>
@@ -6140,7 +6140,7 @@
               <a:spcAft>
                 <a:spcPts val="100"/>
               </a:spcAft>
-              <a:defRPr sz="1300">
+              <a:defRPr sz="1800">
                 <a:solidFill>
                   <a:srgbClr val="333333"/>
                 </a:solidFill>
@@ -6148,7 +6148,7 @@
               </a:defRPr>
             </a:pPr>
             <a:r>
-              <a:t>drive_intersections(tracker, 2)</a:t>
+              <a:t>drive_intersections(2)</a:t>
             </a:r>
           </a:p>
           <a:p>
@@ -6156,7 +6156,7 @@
               <a:spcAft>
                 <a:spcPts val="100"/>
               </a:spcAft>
-              <a:defRPr sz="1300">
+              <a:defRPr sz="1800">
                 <a:solidFill>
                   <a:srgbClr val="333333"/>
                 </a:solidFill>
@@ -6164,7 +6164,7 @@
               </a:defRPr>
             </a:pPr>
             <a:r>
-              <a:t>tracker.turn_left()</a:t>
+              <a:t>turn_left()</a:t>
             </a:r>
           </a:p>
           <a:p>
@@ -6172,7 +6172,7 @@
               <a:spcAft>
                 <a:spcPts val="100"/>
               </a:spcAft>
-              <a:defRPr sz="1300">
+              <a:defRPr sz="1800">
                 <a:solidFill>
                   <a:srgbClr val="333333"/>
                 </a:solidFill>
@@ -6180,7 +6180,7 @@
               </a:defRPr>
             </a:pPr>
             <a:r>
-              <a:t>drive_intersections(tracker, 2)</a:t>
+              <a:t>drive_intersections(2)</a:t>
             </a:r>
           </a:p>
         </p:txBody>
@@ -6256,7 +6256,7 @@
               <a:spcAft>
                 <a:spcPts val="100"/>
               </a:spcAft>
-              <a:defRPr sz="1300">
+              <a:defRPr sz="1800">
                 <a:solidFill>
                   <a:srgbClr val="333333"/>
                 </a:solidFill>
@@ -6272,7 +6272,7 @@
               <a:spcAft>
                 <a:spcPts val="100"/>
               </a:spcAft>
-              <a:defRPr sz="1300">
+              <a:defRPr sz="1800">
                 <a:solidFill>
                   <a:srgbClr val="333333"/>
                 </a:solidFill>
@@ -6280,7 +6280,7 @@
               </a:defRPr>
             </a:pPr>
             <a:r>
-              <a:t>    drive_intersections(tracker, 1)</a:t>
+              <a:t>    drive_intersections(1)</a:t>
             </a:r>
           </a:p>
           <a:p>
@@ -6288,7 +6288,7 @@
               <a:spcAft>
                 <a:spcPts val="100"/>
               </a:spcAft>
-              <a:defRPr sz="1300">
+              <a:defRPr sz="1800">
                 <a:solidFill>
                   <a:srgbClr val="333333"/>
                 </a:solidFill>
@@ -6296,7 +6296,7 @@
               </a:defRPr>
             </a:pPr>
             <a:r>
-              <a:t>    tracker.turn_right()</a:t>
+              <a:t>    turn_right()</a:t>
             </a:r>
           </a:p>
           <a:p>
@@ -6304,7 +6304,7 @@
               <a:spcAft>
                 <a:spcPts val="100"/>
               </a:spcAft>
-              <a:defRPr sz="1300">
+              <a:defRPr sz="1800">
                 <a:solidFill>
                   <a:srgbClr val="333333"/>
                 </a:solidFill>
@@ -6312,7 +6312,7 @@
               </a:defRPr>
             </a:pPr>
             <a:r>
-              <a:t>    drive_intersections(tracker, 1)</a:t>
+              <a:t>    drive_intersections(1)</a:t>
             </a:r>
           </a:p>
           <a:p>
@@ -6320,7 +6320,7 @@
               <a:spcAft>
                 <a:spcPts val="100"/>
               </a:spcAft>
-              <a:defRPr sz="1300">
+              <a:defRPr sz="1800">
                 <a:solidFill>
                   <a:srgbClr val="333333"/>
                 </a:solidFill>
@@ -6328,7 +6328,7 @@
               </a:defRPr>
             </a:pPr>
             <a:r>
-              <a:t>    tracker.turn_left()</a:t>
+              <a:t>    turn_left()</a:t>
             </a:r>
           </a:p>
         </p:txBody>
@@ -6641,7 +6641,7 @@
               <a:spcAft>
                 <a:spcPts val="100"/>
               </a:spcAft>
-              <a:defRPr sz="1300">
+              <a:defRPr sz="1800">
                 <a:solidFill>
                   <a:srgbClr val="333333"/>
                 </a:solidFill>
@@ -6657,7 +6657,7 @@
               <a:spcAft>
                 <a:spcPts val="100"/>
               </a:spcAft>
-              <a:defRPr sz="1300">
+              <a:defRPr sz="1800">
                 <a:solidFill>
                   <a:srgbClr val="333333"/>
                 </a:solidFill>
@@ -6665,7 +6665,7 @@
               </a:defRPr>
             </a:pPr>
             <a:r>
-              <a:t>tracker.turn_right()</a:t>
+              <a:t>turn_right()</a:t>
             </a:r>
           </a:p>
           <a:p>
@@ -6673,7 +6673,7 @@
               <a:spcAft>
                 <a:spcPts val="100"/>
               </a:spcAft>
-              <a:defRPr sz="1300">
+              <a:defRPr sz="1800">
                 <a:solidFill>
                   <a:srgbClr val="333333"/>
                 </a:solidFill>
@@ -6686,7 +6686,7 @@
               <a:spcAft>
                 <a:spcPts val="100"/>
               </a:spcAft>
-              <a:defRPr sz="1300">
+              <a:defRPr sz="1800">
                 <a:solidFill>
                   <a:srgbClr val="333333"/>
                 </a:solidFill>
@@ -6702,7 +6702,7 @@
               <a:spcAft>
                 <a:spcPts val="100"/>
               </a:spcAft>
-              <a:defRPr sz="1300">
+              <a:defRPr sz="1800">
                 <a:solidFill>
                   <a:srgbClr val="333333"/>
                 </a:solidFill>
@@ -6710,7 +6710,7 @@
               </a:defRPr>
             </a:pPr>
             <a:r>
-              <a:t>tracker.track_until_cross()</a:t>
+              <a:t>track_until_cross()</a:t>
             </a:r>
           </a:p>
           <a:p>
@@ -6718,7 +6718,7 @@
               <a:spcAft>
                 <a:spcPts val="100"/>
               </a:spcAft>
-              <a:defRPr sz="1300">
+              <a:defRPr sz="1800">
                 <a:solidFill>
                   <a:srgbClr val="333333"/>
                 </a:solidFill>
@@ -6726,7 +6726,7 @@
               </a:defRPr>
             </a:pPr>
             <a:r>
-              <a:t>tracker.turn_right()</a:t>
+              <a:t>turn_right()</a:t>
             </a:r>
           </a:p>
         </p:txBody>
@@ -6802,7 +6802,7 @@
               <a:spcAft>
                 <a:spcPts val="100"/>
               </a:spcAft>
-              <a:defRPr sz="1300">
+              <a:defRPr sz="1800">
                 <a:solidFill>
                   <a:srgbClr val="333333"/>
                 </a:solidFill>
@@ -6818,7 +6818,7 @@
               <a:spcAft>
                 <a:spcPts val="100"/>
               </a:spcAft>
-              <a:defRPr sz="1300">
+              <a:defRPr sz="1800">
                 <a:solidFill>
                   <a:srgbClr val="333333"/>
                 </a:solidFill>
@@ -6826,7 +6826,7 @@
               </a:defRPr>
             </a:pPr>
             <a:r>
-              <a:t>tracker.turn_right()</a:t>
+              <a:t>turn_right()</a:t>
             </a:r>
           </a:p>
           <a:p>
@@ -6834,7 +6834,7 @@
               <a:spcAft>
                 <a:spcPts val="100"/>
               </a:spcAft>
-              <a:defRPr sz="1300">
+              <a:defRPr sz="1800">
                 <a:solidFill>
                   <a:srgbClr val="333333"/>
                 </a:solidFill>
@@ -6842,23 +6842,7 @@
               </a:defRPr>
             </a:pPr>
             <a:r>
-              <a:t>tracker.drivetrain.set_effort(0.3, 0.3)  # Not needed!</a:t>
-            </a:r>
-          </a:p>
-          <a:p>
-            <a:pPr>
-              <a:spcAft>
-                <a:spcPts val="100"/>
-              </a:spcAft>
-              <a:defRPr sz="1300">
-                <a:solidFill>
-                  <a:srgbClr val="333333"/>
-                </a:solidFill>
-                <a:latin typeface="Courier New"/>
-              </a:defRPr>
-            </a:pPr>
-            <a:r>
-              <a:t>time.sleep(0.3)</a:t>
+              <a:t>clear_intersection()</a:t>
             </a:r>
           </a:p>
         </p:txBody>
